--- a/lectures/week-04/index.pptx
+++ b/lectures/week-04/index.pptx
@@ -9,6 +9,7 @@
     <p:sldId id="257" r:id="rId3"/>
     <p:sldId id="258" r:id="rId4"/>
     <p:sldId id="259" r:id="rId5"/>
+    <p:sldId id="260" r:id="rId6"/>
   </p:sldIdLst>
   <p:sldSz cx="9144000" cy="5143500" type="screen16x9"/>
   <p:notesSz cx="6858000" cy="9144000"/>
@@ -3208,12 +3209,12 @@
       </p:grpSpPr>
       <p:sp>
         <p:nvSpPr>
-          <p:cNvPr id="2" name="Title 1"/>
-          <p:cNvSpPr>
-            <a:spLocks noGrp="1"/>
-          </p:cNvSpPr>
-          <p:nvPr>
-            <p:ph type="title"/>
+          <p:cNvPr id="3" name="Content Placeholder 2"/>
+          <p:cNvSpPr>
+            <a:spLocks noGrp="1"/>
+          </p:cNvSpPr>
+          <p:nvPr>
+            <p:ph idx="1"/>
           </p:nvPr>
         </p:nvSpPr>
         <p:spPr/>
@@ -3225,43 +3226,12 @@
               <a:buNone/>
             </a:pPr>
             <a:r>
+              <a:rPr b="1"/>
+              <a:t>Draft Material:</a:t>
+            </a:r>
+            <a:r>
               <a:rPr/>
-              <a:t>Preparation</a:t>
-            </a:r>
-          </a:p>
-        </p:txBody>
-      </p:sp>
-      <p:sp>
-        <p:nvSpPr>
-          <p:cNvPr id="3" name="Content Placeholder 2"/>
-          <p:cNvSpPr>
-            <a:spLocks noGrp="1"/>
-          </p:cNvSpPr>
-          <p:nvPr>
-            <p:ph idx="1"/>
-          </p:nvPr>
-        </p:nvSpPr>
-        <p:spPr/>
-        <p:txBody>
-          <a:bodyPr/>
-          <a:lstStyle/>
-          <a:p>
-            <a:pPr lvl="0" indent="0" marL="0">
-              <a:buNone/>
-            </a:pPr>
-            <a:r>
-              <a:rPr/>
-              <a:t>Sections 1 and 2 of </a:t>
-            </a:r>
-            <a:r>
-              <a:rPr>
-                <a:hlinkClick r:id="rId2"/>
-              </a:rPr>
-              <a:t>Jeff Miller’s BMS</a:t>
-            </a:r>
-            <a:r>
-              <a:rPr/>
-              <a:t> book</a:t>
+              <a:t> This content is under development and subject to change.</a:t>
             </a:r>
           </a:p>
         </p:txBody>
@@ -3308,7 +3278,7 @@
             </a:pPr>
             <a:r>
               <a:rPr/>
-              <a:t>Coming Soon</a:t>
+              <a:t>Preparation</a:t>
             </a:r>
           </a:p>
         </p:txBody>
@@ -3333,7 +3303,17 @@
             </a:pPr>
             <a:r>
               <a:rPr/>
-              <a:t>This lecture is under development.</a:t>
+              <a:t>Sections 1 and 2 of </a:t>
+            </a:r>
+            <a:r>
+              <a:rPr>
+                <a:hlinkClick r:id="rId2"/>
+              </a:rPr>
+              <a:t>Jeff Miller’s BMS</a:t>
+            </a:r>
+            <a:r>
+              <a:rPr/>
+              <a:t> book</a:t>
             </a:r>
           </a:p>
         </p:txBody>
@@ -3344,6 +3324,78 @@
 </file>
 
 <file path=ppt/slides/slide4.xml><?xml version="1.0" encoding="utf-8"?>
+<p:sld xmlns:a="http://schemas.openxmlformats.org/drawingml/2006/main" xmlns:r="http://schemas.openxmlformats.org/officeDocument/2006/relationships" xmlns:p="http://schemas.openxmlformats.org/presentationml/2006/main">
+  <p:cSld>
+    <p:spTree>
+      <p:nvGrpSpPr>
+        <p:cNvPr id="1" name=""/>
+        <p:cNvGrpSpPr/>
+        <p:nvPr/>
+      </p:nvGrpSpPr>
+      <p:grpSpPr>
+        <a:xfrm>
+          <a:off x="0" y="0"/>
+          <a:ext cx="0" cy="0"/>
+          <a:chOff x="0" y="0"/>
+          <a:chExt cx="0" cy="0"/>
+        </a:xfrm>
+      </p:grpSpPr>
+      <p:sp>
+        <p:nvSpPr>
+          <p:cNvPr id="2" name="Title 1"/>
+          <p:cNvSpPr>
+            <a:spLocks noGrp="1"/>
+          </p:cNvSpPr>
+          <p:nvPr>
+            <p:ph type="title"/>
+          </p:nvPr>
+        </p:nvSpPr>
+        <p:spPr/>
+        <p:txBody>
+          <a:bodyPr/>
+          <a:lstStyle/>
+          <a:p>
+            <a:pPr lvl="0" indent="0" marL="0">
+              <a:buNone/>
+            </a:pPr>
+            <a:r>
+              <a:rPr/>
+              <a:t>Coming Soon</a:t>
+            </a:r>
+          </a:p>
+        </p:txBody>
+      </p:sp>
+      <p:sp>
+        <p:nvSpPr>
+          <p:cNvPr id="3" name="Content Placeholder 2"/>
+          <p:cNvSpPr>
+            <a:spLocks noGrp="1"/>
+          </p:cNvSpPr>
+          <p:nvPr>
+            <p:ph idx="1"/>
+          </p:nvPr>
+        </p:nvSpPr>
+        <p:spPr/>
+        <p:txBody>
+          <a:bodyPr/>
+          <a:lstStyle/>
+          <a:p>
+            <a:pPr lvl="0" indent="0" marL="0">
+              <a:buNone/>
+            </a:pPr>
+            <a:r>
+              <a:rPr/>
+              <a:t>This lecture is under development.</a:t>
+            </a:r>
+          </a:p>
+        </p:txBody>
+      </p:sp>
+    </p:spTree>
+  </p:cSld>
+</p:sld>
+</file>
+
+<file path=ppt/slides/slide5.xml><?xml version="1.0" encoding="utf-8"?>
 <p:sld xmlns:a="http://schemas.openxmlformats.org/drawingml/2006/main" xmlns:r="http://schemas.openxmlformats.org/officeDocument/2006/relationships" xmlns:p="http://schemas.openxmlformats.org/presentationml/2006/main">
   <p:cSld>
     <p:spTree>

--- a/lectures/week-04/index.pptx
+++ b/lectures/week-04/index.pptx
@@ -22864,6 +22864,33 @@
                 <a:hlinkClick r:id="rId2"/>
               </a:rPr>
               <a:t>https://doi.org/10.1088/1748-9326/ac0278</a:t>
+            </a:r>
+            <a:r>
+              <a:rPr/>
+              <a:t>.</a:t>
+            </a:r>
+          </a:p>
+          <a:p>
+            <a:pPr lvl="0" indent="0" marL="0">
+              <a:buNone/>
+            </a:pPr>
+            <a:r>
+              <a:rPr/>
+              <a:t>Jones, Dave. 2025. “The Uninsurable Future: The Climate Threat to Property Insurance, and How to Stop It.” </a:t>
+            </a:r>
+            <a:r>
+              <a:rPr i="1"/>
+              <a:t>Yale Law Journal</a:t>
+            </a:r>
+            <a:r>
+              <a:rPr/>
+              <a:t> 135 (December). </a:t>
+            </a:r>
+            <a:r>
+              <a:rPr>
+                <a:hlinkClick r:id="rId3"/>
+              </a:rPr>
+              <a:t>https://yalelawjournal.org/essay/the-uninsurable-future-the-climate-threat-to-property-insurance-and-how-to-stop-it</a:t>
             </a:r>
             <a:r>
               <a:rPr/>

--- a/lectures/week-04/index.pptx
+++ b/lectures/week-04/index.pptx
@@ -5803,7 +5803,7 @@
             <a:br/>
             <a:r>
               <a:rPr/>
-              <a:t>Dr. James Doss-Gollin</a:t>
+              <a:t>James Doss-Gollin</a:t>
             </a:r>
           </a:p>
         </p:txBody>

--- a/lectures/week-04/index.pptx
+++ b/lectures/week-04/index.pptx
@@ -5970,21 +5970,23 @@
                       </m:rPr>
                       <m:t>−</m:t>
                     </m:r>
+                    <m:r>
+                      <m:rPr>
+                        <m:sty m:val="p"/>
+                      </m:rPr>
+                      <m:t>(</m:t>
+                    </m:r>
+                    <m:r>
+                      <m:t>0.99</m:t>
+                    </m:r>
                     <m:sSup>
                       <m:e>
-                        <m:d>
-                          <m:dPr>
-                            <m:begChr m:val="("/>
-                            <m:sepChr m:val=""/>
-                            <m:endChr m:val=")"/>
-                            <m:grow/>
-                          </m:dPr>
-                          <m:e>
-                            <m:r>
-                              <m:t>0.99</m:t>
-                            </m:r>
-                          </m:e>
-                        </m:d>
+                        <m:r>
+                          <m:rPr>
+                            <m:sty m:val="p"/>
+                          </m:rPr>
+                          <m:t>)</m:t>
+                        </m:r>
                       </m:e>
                       <m:sup>
                         <m:r>
@@ -6236,37 +6238,39 @@
                 </a:r>
                 <a14:m>
                   <m:oMath xmlns:m="http://schemas.openxmlformats.org/officeDocument/2006/math">
-                    <m:d>
-                      <m:dPr>
-                        <m:begChr m:val="("/>
-                        <m:sepChr m:val=""/>
-                        <m:endChr m:val=")"/>
-                        <m:grow/>
-                      </m:dPr>
-                      <m:e>
-                        <m:r>
-                          <m:t>μ</m:t>
-                        </m:r>
-                        <m:r>
-                          <m:rPr>
-                            <m:sty m:val="p"/>
-                          </m:rPr>
-                          <m:t>,</m:t>
-                        </m:r>
-                        <m:r>
-                          <m:t>σ</m:t>
-                        </m:r>
-                        <m:r>
-                          <m:rPr>
-                            <m:sty m:val="p"/>
-                          </m:rPr>
-                          <m:t>,</m:t>
-                        </m:r>
-                        <m:r>
-                          <m:t>ξ</m:t>
-                        </m:r>
-                      </m:e>
-                    </m:d>
+                    <m:r>
+                      <m:rPr>
+                        <m:sty m:val="p"/>
+                      </m:rPr>
+                      <m:t>(</m:t>
+                    </m:r>
+                    <m:r>
+                      <m:t>μ</m:t>
+                    </m:r>
+                    <m:r>
+                      <m:rPr>
+                        <m:sty m:val="p"/>
+                      </m:rPr>
+                      <m:t>,</m:t>
+                    </m:r>
+                    <m:r>
+                      <m:t>σ</m:t>
+                    </m:r>
+                    <m:r>
+                      <m:rPr>
+                        <m:sty m:val="p"/>
+                      </m:rPr>
+                      <m:t>,</m:t>
+                    </m:r>
+                    <m:r>
+                      <m:t>ξ</m:t>
+                    </m:r>
+                    <m:r>
+                      <m:rPr>
+                        <m:sty m:val="p"/>
+                      </m:rPr>
+                      <m:t>)</m:t>
+                    </m:r>
                   </m:oMath>
                 </a14:m>
                 <a:r>
@@ -7556,7 +7560,9 @@
         <p:nvSpPr>
           <p:cNvPr id="1" name="TextBox 3"/>
           <p:cNvSpPr txBox="1"/>
-          <p:nvPr/>
+          <p:nvPr>
+            <p:ph idx="1"/>
+          </p:nvPr>
         </p:nvSpPr>
         <p:spPr>
           <a:xfrm>
@@ -7669,7 +7675,9 @@
         <p:nvSpPr>
           <p:cNvPr id="1" name="TextBox 3"/>
           <p:cNvSpPr txBox="1"/>
-          <p:nvPr/>
+          <p:nvPr>
+            <p:ph idx="1"/>
+          </p:nvPr>
         </p:nvSpPr>
         <p:spPr>
           <a:xfrm>
@@ -7776,7 +7784,9 @@
         <p:nvSpPr>
           <p:cNvPr id="1" name="TextBox 3"/>
           <p:cNvSpPr txBox="1"/>
-          <p:nvPr/>
+          <p:nvPr>
+            <p:ph idx="1"/>
+          </p:nvPr>
         </p:nvSpPr>
         <p:spPr>
           <a:xfrm>
@@ -10886,7 +10896,7 @@
 </p:sld>
 </file>
 
-<file path=ppt/slides/slide21.xml><?xml version="1.0" encoding="UTF-8"?><p:sld xmlns:a="http://schemas.openxmlformats.org/drawingml/2006/main" xmlns:r="http://schemas.openxmlformats.org/officeDocument/2006/relationships" xmlns:p="http://schemas.openxmlformats.org/presentationml/2006/main"><p:cSld><p:spTree><p:nvGrpSpPr><p:cNvPr id="1" name="" /><p:cNvGrpSpPr /><p:nvPr /></p:nvGrpSpPr><p:grpSpPr><a:xfrm><a:off x="0" y="0" /><a:ext cx="0" cy="0" /><a:chOff x="0" y="0" /><a:chExt cx="0" cy="0" /></a:xfrm></p:grpSpPr><p:sp><p:nvSpPr><p:cNvPr id="2" name="Title 1" /><p:cNvSpPr><a:spLocks noGrp="1" /></p:cNvSpPr><p:nvPr><p:ph type="title" /></p:nvPr></p:nvSpPr><p:spPr><a:xfrm><a:off x="457201" y="204787" /><a:ext cx="3008313" cy="871538" /></a:xfrm></p:spPr><p:txBody><a:bodyPr /><a:lstStyle /><a:p><a:pPr lvl="0" indent="0" marL="0"><a:buNone /></a:pPr><a:r><a:rPr /><a:t>The Pareto Tail Index</a:t></a:r></a:p></p:txBody></p:sp><mc:AlternateContent xmlns:mc="http://schemas.openxmlformats.org/markup-compatibility/2006"><mc:Choice xmlns:a14="http://schemas.microsoft.com/office/drawing/2010/main" Requires="a14"><p:sp><p:nvSpPr><p:cNvPr id="4" name="Text Placeholder 3" /><p:cNvSpPr><a:spLocks noGrp="1" /></p:cNvSpPr><p:nvPr><p:ph idx="2" sz="half" type="body" /></p:nvPr></p:nvSpPr><p:spPr /><p:txBody><a:bodyPr /><a:lstStyle /><a:p><a:pPr lvl="0" indent="0" marL="0"><a:buNone /></a:pPr><a:r><a:rPr /><a:t>For a Pareto distribution: </a:t></a:r><a14:m><m:oMath xmlns:m="http://schemas.openxmlformats.org/officeDocument/2006/math"><m:r><m:t>P</m:t></m:r><m:d><m:dPr><m:begChr m:val="(" /><m:sepChr m:val="" /><m:endChr m:val=")" /><m:grow /></m:dPr><m:e><m:r><m:t>X</m:t></m:r><m:r><m:rPr><m:sty m:val="p" /></m:rPr><m:t>&gt;</m:t></m:r><m:r><m:t>x</m:t></m:r></m:e></m:d><m:r><m:rPr><m:sty m:val="p" /></m:rPr><m:t>∼</m:t></m:r><m:sSup><m:e><m:r><m:t>x</m:t></m:r></m:e><m:sup><m:r><m:rPr><m:sty m:val="p" /></m:rPr><m:t>−</m:t></m:r><m:r><m:t>α</m:t></m:r></m:sup></m:sSup></m:oMath></a14:m><a:r><a:rPr /><a:t> as </a:t></a:r><a14:m><m:oMath xmlns:m="http://schemas.openxmlformats.org/officeDocument/2006/math"><m:r><m:t>x</m:t></m:r><m:r><m:rPr><m:sty m:val="p" /></m:rPr><m:t>→</m:t></m:r><m:r><m:rPr><m:sty m:val="p" /></m:rPr><m:t>∞</m:t></m:r></m:oMath></a14:m></a:p><a:p><a:pPr lvl="0" indent="0" marL="0"><a:buNone /></a:pPr><a:r><a:rPr b="1" /><a:t>Tail index</a:t></a:r><a:r><a:rPr /><a:t> </a:t></a:r><a14:m><m:oMath xmlns:m="http://schemas.openxmlformats.org/officeDocument/2006/math"><m:r><m:t>α</m:t></m:r></m:oMath></a14:m><a:r><a:rPr /><a:t> controls both tail heaviness and moment existence:</a:t></a:r></a:p></p:txBody></p:sp></mc:Choice></mc:AlternateContent><p:graphicFrame><p:nvGraphicFramePr><p:cNvPr id="6" name="Content Placeholder 5" /><p:cNvGraphicFramePr><a:graphicFrameLocks noGrp="1" /></p:cNvGraphicFramePr><p:nvPr><p:ph idx="1" /></p:nvPr></p:nvGraphicFramePr><p:xfrm><a:off x="3568700" y="203200" /><a:ext cx="5105400" cy="4381500" /></p:xfrm><a:graphic><a:graphicData uri="http://schemas.openxmlformats.org/drawingml/2006/table"><a:tbl><a:tblPr firstRow="1" bandRow="1"><a:tableStyleId>{5C22544A-7EE6-4342-B048-85BDC9FD1C3A}</a:tableStyleId></a:tblPr><a:tblGrid><a:gridCol w="1270000" /><a:gridCol w="1270000" /><a:gridCol w="1270000" /><a:gridCol w="1270000" /></a:tblGrid><a:tr h="0"><a:tc><a:txBody><a:bodyPr /><a:lstStyle /><a:p><a:pPr lvl="0" indent="0" marL="0"><a:buNone /></a:pPr><a14:m><m:oMath xmlns:m="http://schemas.openxmlformats.org/officeDocument/2006/math"><m:r><m:t>α</m:t></m:r></m:oMath></a14:m></a:p></a:txBody><a:tcPr /></a:tc><a:tc><a:txBody><a:bodyPr /><a:lstStyle /><a:p><a:pPr lvl="0" indent="0" marL="0"><a:buNone /></a:pPr><a:r><a:rPr /><a:t>Mean</a:t></a:r></a:p></a:txBody><a:tcPr /></a:tc><a:tc><a:txBody><a:bodyPr /><a:lstStyle /><a:p><a:pPr lvl="0" indent="0" marL="0"><a:buNone /></a:pPr><a:r><a:rPr /><a:t>Variance</a:t></a:r></a:p></a:txBody><a:tcPr /></a:tc><a:tc><a:txBody><a:bodyPr /><a:lstStyle /><a:p><a:pPr lvl="0" indent="0" marL="0"><a:buNone /></a:pPr><a:r><a:rPr /><a:t>Physical Plausibility</a:t></a:r></a:p></a:txBody><a:tcPr /></a:tc></a:tr><a:tr h="0"><a:tc><a:txBody><a:bodyPr /><a:lstStyle /><a:p><a:pPr lvl="0" indent="0" marL="0"><a:buNone /></a:pPr><a14:m><m:oMath xmlns:m="http://schemas.openxmlformats.org/officeDocument/2006/math"><m:r><m:t>α</m:t></m:r><m:r><m:rPr><m:sty m:val="p" /></m:rPr><m:t>≥</m:t></m:r><m:r><m:t>2</m:t></m:r></m:oMath></a14:m></a:p></a:txBody></a:tc><a:tc><a:txBody><a:bodyPr /><a:lstStyle /><a:p><a:pPr lvl="0" indent="0" marL="0"><a:buNone /></a:pPr><a:r><a:rPr /><a:t>Finite</a:t></a:r></a:p></a:txBody></a:tc><a:tc><a:txBody><a:bodyPr /><a:lstStyle /><a:p><a:pPr lvl="0" indent="0" marL="0"><a:buNone /></a:pPr><a:r><a:rPr /><a:t>Finite</a:t></a:r></a:p></a:txBody></a:tc><a:tc><a:txBody><a:bodyPr /><a:lstStyle /><a:p><a:pPr lvl="0" indent="0" marL="0"><a:buNone /></a:pPr><a:r><a:rPr /><a:t>Most climate/flood risks</a:t></a:r></a:p></a:txBody></a:tc></a:tr><a:tr h="0"><a:tc><a:txBody><a:bodyPr /><a:lstStyle /><a:p><a:pPr lvl="0" indent="0" marL="0"><a:buNone /></a:pPr><a14:m><m:oMath xmlns:m="http://schemas.openxmlformats.org/officeDocument/2006/math"><m:r><m:t>1</m:t></m:r><m:r><m:rPr><m:sty m:val="p" /></m:rPr><m:t>&lt;</m:t></m:r><m:r><m:t>α</m:t></m:r><m:r><m:rPr><m:sty m:val="p" /></m:rPr><m:t>&lt;</m:t></m:r><m:r><m:t>2</m:t></m:r></m:oMath></a14:m></a:p></a:txBody></a:tc><a:tc><a:txBody><a:bodyPr /><a:lstStyle /><a:p><a:pPr lvl="0" indent="0" marL="0"><a:buNone /></a:pPr><a:r><a:rPr /><a:t>Finite</a:t></a:r></a:p></a:txBody></a:tc><a:tc><a:txBody><a:bodyPr /><a:lstStyle /><a:p><a:pPr lvl="0" indent="0" marL="0"><a:buNone /></a:pPr><a:r><a:rPr /><a:t>Infinite</a:t></a:r></a:p></a:txBody></a:tc><a:tc><a:txBody><a:bodyPr /><a:lstStyle /><a:p><a:pPr lvl="0" indent="0" marL="0"><a:buNone /></a:pPr><a:r><a:rPr /><a:t>Some extreme events</a:t></a:r></a:p></a:txBody></a:tc></a:tr><a:tr h="0"><a:tc><a:txBody><a:bodyPr /><a:lstStyle /><a:p><a:pPr lvl="0" indent="0" marL="0"><a:buNone /></a:pPr><a14:m><m:oMath xmlns:m="http://schemas.openxmlformats.org/officeDocument/2006/math"><m:r><m:t>α</m:t></m:r><m:r><m:rPr><m:sty m:val="p" /></m:rPr><m:t>&lt;</m:t></m:r><m:r><m:t>1</m:t></m:r></m:oMath></a14:m></a:p></a:txBody></a:tc><a:tc><a:txBody><a:bodyPr /><a:lstStyle /><a:p><a:pPr lvl="0" indent="0" marL="0"><a:buNone /></a:pPr><a:r><a:rPr /><a:t>Infinite</a:t></a:r></a:p></a:txBody></a:tc><a:tc><a:txBody><a:bodyPr /><a:lstStyle /><a:p><a:pPr lvl="0" indent="0" marL="0"><a:buNone /></a:pPr><a:r><a:rPr /><a:t>Infinite</a:t></a:r></a:p></a:txBody></a:tc><a:tc><a:txBody><a:bodyPr /><a:lstStyle /><a:p><a:pPr lvl="0" indent="0" marL="0"><a:buNone /></a:pPr><a:r><a:rPr /><a:t>Unlikely in nature</a:t></a:r></a:p></a:txBody></a:tc></a:tr></a:tbl></a:graphicData></a:graphic></p:graphicFrame></p:spTree></p:cSld></p:sld>
+<file path=ppt/slides/slide21.xml><?xml version="1.0" encoding="UTF-8"?><p:sld xmlns:a="http://schemas.openxmlformats.org/drawingml/2006/main" xmlns:r="http://schemas.openxmlformats.org/officeDocument/2006/relationships" xmlns:p="http://schemas.openxmlformats.org/presentationml/2006/main"><p:cSld><p:spTree><p:nvGrpSpPr><p:cNvPr id="1" name="" /><p:cNvGrpSpPr /><p:nvPr /></p:nvGrpSpPr><p:grpSpPr><a:xfrm><a:off x="0" y="0" /><a:ext cx="0" cy="0" /><a:chOff x="0" y="0" /><a:chExt cx="0" cy="0" /></a:xfrm></p:grpSpPr><p:sp><p:nvSpPr><p:cNvPr id="2" name="Title 1" /><p:cNvSpPr><a:spLocks noGrp="1" /></p:cNvSpPr><p:nvPr><p:ph type="title" /></p:nvPr></p:nvSpPr><p:spPr><a:xfrm><a:off x="457201" y="204787" /><a:ext cx="3008313" cy="871538" /></a:xfrm></p:spPr><p:txBody><a:bodyPr /><a:lstStyle /><a:p><a:pPr lvl="0" indent="0" marL="0"><a:buNone /></a:pPr><a:r><a:rPr /><a:t>The Pareto Tail Index</a:t></a:r></a:p></p:txBody></p:sp><mc:AlternateContent xmlns:mc="http://schemas.openxmlformats.org/markup-compatibility/2006"><mc:Choice xmlns:a14="http://schemas.microsoft.com/office/drawing/2010/main" Requires="a14"><p:sp><p:nvSpPr><p:cNvPr id="4" name="Text Placeholder 3" /><p:cNvSpPr><a:spLocks noGrp="1" /></p:cNvSpPr><p:nvPr><p:ph idx="2" sz="half" type="body" /></p:nvPr></p:nvSpPr><p:spPr /><p:txBody><a:bodyPr /><a:lstStyle /><a:p><a:pPr lvl="0" indent="0" marL="0"><a:buNone /></a:pPr><a:r><a:rPr /><a:t>For a Pareto distribution: </a:t></a:r><a14:m><m:oMath xmlns:m="http://schemas.openxmlformats.org/officeDocument/2006/math"><m:r><m:t>P</m:t></m:r><m:r><m:rPr><m:sty m:val="p" /></m:rPr><m:t>(</m:t></m:r><m:r><m:t>X</m:t></m:r><m:r><m:rPr><m:sty m:val="p" /></m:rPr><m:t>&gt;</m:t></m:r><m:r><m:t>x</m:t></m:r><m:r><m:rPr><m:sty m:val="p" /></m:rPr><m:t>)</m:t></m:r><m:r><m:rPr><m:sty m:val="p" /></m:rPr><m:t>∼</m:t></m:r><m:sSup><m:e><m:r><m:t>x</m:t></m:r></m:e><m:sup><m:r><m:rPr><m:sty m:val="p" /></m:rPr><m:t>−</m:t></m:r><m:r><m:t>α</m:t></m:r></m:sup></m:sSup></m:oMath></a14:m><a:r><a:rPr /><a:t> as </a:t></a:r><a14:m><m:oMath xmlns:m="http://schemas.openxmlformats.org/officeDocument/2006/math"><m:r><m:t>x</m:t></m:r><m:r><m:rPr><m:sty m:val="p" /></m:rPr><m:t>→</m:t></m:r><m:r><m:rPr><m:sty m:val="p" /></m:rPr><m:t>∞</m:t></m:r></m:oMath></a14:m></a:p><a:p><a:pPr lvl="0" indent="0" marL="0"><a:buNone /></a:pPr><a:r><a:rPr b="1" /><a:t>Tail index</a:t></a:r><a:r><a:rPr /><a:t> </a:t></a:r><a14:m><m:oMath xmlns:m="http://schemas.openxmlformats.org/officeDocument/2006/math"><m:r><m:t>α</m:t></m:r></m:oMath></a14:m><a:r><a:rPr /><a:t> controls both tail heaviness and moment existence:</a:t></a:r></a:p></p:txBody></p:sp></mc:Choice></mc:AlternateContent><p:graphicFrame><p:nvGraphicFramePr><p:cNvPr id="6" name="Content Placeholder 5" /><p:cNvGraphicFramePr><a:graphicFrameLocks noGrp="1" /></p:cNvGraphicFramePr><p:nvPr><p:ph idx="1" /></p:nvPr></p:nvGraphicFramePr><p:xfrm><a:off x="3568700" y="203200" /><a:ext cx="5105400" cy="4381500" /></p:xfrm><a:graphic><a:graphicData uri="http://schemas.openxmlformats.org/drawingml/2006/table"><a:tbl><a:tblPr firstRow="1" bandRow="1"><a:tableStyleId>{5C22544A-7EE6-4342-B048-85BDC9FD1C3A}</a:tableStyleId></a:tblPr><a:tblGrid><a:gridCol w="1270000" /><a:gridCol w="1270000" /><a:gridCol w="1270000" /><a:gridCol w="1270000" /></a:tblGrid><a:tr h="0"><a:tc><a:txBody><a:bodyPr /><a:lstStyle /><a:p><a:pPr lvl="0" indent="0" marL="0"><a:buNone /></a:pPr><a14:m><m:oMath xmlns:m="http://schemas.openxmlformats.org/officeDocument/2006/math"><m:r><m:t>α</m:t></m:r></m:oMath></a14:m></a:p></a:txBody><a:tcPr /></a:tc><a:tc><a:txBody><a:bodyPr /><a:lstStyle /><a:p><a:pPr lvl="0" indent="0" marL="0"><a:buNone /></a:pPr><a:r><a:rPr /><a:t>Mean</a:t></a:r></a:p></a:txBody><a:tcPr /></a:tc><a:tc><a:txBody><a:bodyPr /><a:lstStyle /><a:p><a:pPr lvl="0" indent="0" marL="0"><a:buNone /></a:pPr><a:r><a:rPr /><a:t>Variance</a:t></a:r></a:p></a:txBody><a:tcPr /></a:tc><a:tc><a:txBody><a:bodyPr /><a:lstStyle /><a:p><a:pPr lvl="0" indent="0" marL="0"><a:buNone /></a:pPr><a:r><a:rPr /><a:t>Physical Plausibility</a:t></a:r></a:p></a:txBody><a:tcPr /></a:tc></a:tr><a:tr h="0"><a:tc><a:txBody><a:bodyPr /><a:lstStyle /><a:p><a:pPr lvl="0" indent="0" marL="0"><a:buNone /></a:pPr><a14:m><m:oMath xmlns:m="http://schemas.openxmlformats.org/officeDocument/2006/math"><m:r><m:t>α</m:t></m:r><m:r><m:rPr><m:sty m:val="p" /></m:rPr><m:t>≥</m:t></m:r><m:r><m:t>2</m:t></m:r></m:oMath></a14:m></a:p></a:txBody></a:tc><a:tc><a:txBody><a:bodyPr /><a:lstStyle /><a:p><a:pPr lvl="0" indent="0" marL="0"><a:buNone /></a:pPr><a:r><a:rPr /><a:t>Finite</a:t></a:r></a:p></a:txBody></a:tc><a:tc><a:txBody><a:bodyPr /><a:lstStyle /><a:p><a:pPr lvl="0" indent="0" marL="0"><a:buNone /></a:pPr><a:r><a:rPr /><a:t>Finite</a:t></a:r></a:p></a:txBody></a:tc><a:tc><a:txBody><a:bodyPr /><a:lstStyle /><a:p><a:pPr lvl="0" indent="0" marL="0"><a:buNone /></a:pPr><a:r><a:rPr /><a:t>Most climate/flood risks</a:t></a:r></a:p></a:txBody></a:tc></a:tr><a:tr h="0"><a:tc><a:txBody><a:bodyPr /><a:lstStyle /><a:p><a:pPr lvl="0" indent="0" marL="0"><a:buNone /></a:pPr><a14:m><m:oMath xmlns:m="http://schemas.openxmlformats.org/officeDocument/2006/math"><m:r><m:t>1</m:t></m:r><m:r><m:rPr><m:sty m:val="p" /></m:rPr><m:t>&lt;</m:t></m:r><m:r><m:t>α</m:t></m:r><m:r><m:rPr><m:sty m:val="p" /></m:rPr><m:t>&lt;</m:t></m:r><m:r><m:t>2</m:t></m:r></m:oMath></a14:m></a:p></a:txBody></a:tc><a:tc><a:txBody><a:bodyPr /><a:lstStyle /><a:p><a:pPr lvl="0" indent="0" marL="0"><a:buNone /></a:pPr><a:r><a:rPr /><a:t>Finite</a:t></a:r></a:p></a:txBody></a:tc><a:tc><a:txBody><a:bodyPr /><a:lstStyle /><a:p><a:pPr lvl="0" indent="0" marL="0"><a:buNone /></a:pPr><a:r><a:rPr /><a:t>Infinite</a:t></a:r></a:p></a:txBody></a:tc><a:tc><a:txBody><a:bodyPr /><a:lstStyle /><a:p><a:pPr lvl="0" indent="0" marL="0"><a:buNone /></a:pPr><a:r><a:rPr /><a:t>Some extreme events</a:t></a:r></a:p></a:txBody></a:tc></a:tr><a:tr h="0"><a:tc><a:txBody><a:bodyPr /><a:lstStyle /><a:p><a:pPr lvl="0" indent="0" marL="0"><a:buNone /></a:pPr><a14:m><m:oMath xmlns:m="http://schemas.openxmlformats.org/officeDocument/2006/math"><m:r><m:t>α</m:t></m:r><m:r><m:rPr><m:sty m:val="p" /></m:rPr><m:t>&lt;</m:t></m:r><m:r><m:t>1</m:t></m:r></m:oMath></a14:m></a:p></a:txBody></a:tc><a:tc><a:txBody><a:bodyPr /><a:lstStyle /><a:p><a:pPr lvl="0" indent="0" marL="0"><a:buNone /></a:pPr><a:r><a:rPr /><a:t>Infinite</a:t></a:r></a:p></a:txBody></a:tc><a:tc><a:txBody><a:bodyPr /><a:lstStyle /><a:p><a:pPr lvl="0" indent="0" marL="0"><a:buNone /></a:pPr><a:r><a:rPr /><a:t>Infinite</a:t></a:r></a:p></a:txBody></a:tc><a:tc><a:txBody><a:bodyPr /><a:lstStyle /><a:p><a:pPr lvl="0" indent="0" marL="0"><a:buNone /></a:pPr><a:r><a:rPr /><a:t>Unlikely in nature</a:t></a:r></a:p></a:txBody></a:tc></a:tr></a:tbl></a:graphicData></a:graphic></p:graphicFrame></p:spTree></p:cSld></p:sld>
 </file>
 
 <file path=ppt/slides/slide22.xml><?xml version="1.0" encoding="utf-8"?>
@@ -11069,19 +11079,21 @@
                                       </m:r>
                                     </m:e>
                                     <m:sub>
-                                      <m:d>
-                                        <m:dPr>
-                                          <m:begChr m:val="("/>
-                                          <m:sepChr m:val=""/>
-                                          <m:endChr m:val=")"/>
-                                          <m:grow/>
-                                        </m:dPr>
-                                        <m:e>
-                                          <m:r>
-                                            <m:t>i</m:t>
-                                          </m:r>
-                                        </m:e>
-                                      </m:d>
+                                      <m:r>
+                                        <m:rPr>
+                                          <m:sty m:val="p"/>
+                                        </m:rPr>
+                                        <m:t>(</m:t>
+                                      </m:r>
+                                      <m:r>
+                                        <m:t>i</m:t>
+                                      </m:r>
+                                      <m:r>
+                                        <m:rPr>
+                                          <m:sty m:val="p"/>
+                                        </m:rPr>
+                                        <m:t>)</m:t>
+                                      </m:r>
                                     </m:sub>
                                   </m:sSub>
                                 </m:num>
@@ -11093,28 +11105,30 @@
                                       </m:r>
                                     </m:e>
                                     <m:sub>
-                                      <m:d>
-                                        <m:dPr>
-                                          <m:begChr m:val="("/>
-                                          <m:sepChr m:val=""/>
-                                          <m:endChr m:val=")"/>
-                                          <m:grow/>
-                                        </m:dPr>
-                                        <m:e>
-                                          <m:r>
-                                            <m:t>k</m:t>
-                                          </m:r>
-                                          <m:r>
-                                            <m:rPr>
-                                              <m:sty m:val="p"/>
-                                            </m:rPr>
-                                            <m:t>+</m:t>
-                                          </m:r>
-                                          <m:r>
-                                            <m:t>1</m:t>
-                                          </m:r>
-                                        </m:e>
-                                      </m:d>
+                                      <m:r>
+                                        <m:rPr>
+                                          <m:sty m:val="p"/>
+                                        </m:rPr>
+                                        <m:t>(</m:t>
+                                      </m:r>
+                                      <m:r>
+                                        <m:t>k</m:t>
+                                      </m:r>
+                                      <m:r>
+                                        <m:rPr>
+                                          <m:sty m:val="p"/>
+                                        </m:rPr>
+                                        <m:t>+</m:t>
+                                      </m:r>
+                                      <m:r>
+                                        <m:t>1</m:t>
+                                      </m:r>
+                                      <m:r>
+                                        <m:rPr>
+                                          <m:sty m:val="p"/>
+                                        </m:rPr>
+                                        <m:t>)</m:t>
+                                      </m:r>
                                     </m:sub>
                                   </m:sSub>
                                 </m:den>
@@ -14521,19 +14535,21 @@
                       <m:r>
                         <m:t>E</m:t>
                       </m:r>
-                      <m:d>
-                        <m:dPr>
-                          <m:begChr m:val="["/>
-                          <m:sepChr m:val=""/>
-                          <m:endChr m:val="]"/>
-                          <m:grow/>
-                        </m:dPr>
-                        <m:e>
-                          <m:r>
-                            <m:t>D</m:t>
-                          </m:r>
-                        </m:e>
-                      </m:d>
+                      <m:r>
+                        <m:rPr>
+                          <m:sty m:val="p"/>
+                        </m:rPr>
+                        <m:t>[</m:t>
+                      </m:r>
+                      <m:r>
+                        <m:t>D</m:t>
+                      </m:r>
+                      <m:r>
+                        <m:rPr>
+                          <m:sty m:val="p"/>
+                        </m:rPr>
+                        <m:t>]</m:t>
+                      </m:r>
                       <m:r>
                         <m:rPr>
                           <m:sty m:val="p"/>
@@ -14549,19 +14565,21 @@
                       <m:r>
                         <m:t>D</m:t>
                       </m:r>
-                      <m:d>
-                        <m:dPr>
-                          <m:begChr m:val="("/>
-                          <m:sepChr m:val=""/>
-                          <m:endChr m:val=")"/>
-                          <m:grow/>
-                        </m:dPr>
-                        <m:e>
-                          <m:r>
-                            <m:t>h</m:t>
-                          </m:r>
-                        </m:e>
-                      </m:d>
+                      <m:r>
+                        <m:rPr>
+                          <m:sty m:val="p"/>
+                        </m:rPr>
+                        <m:t>(</m:t>
+                      </m:r>
+                      <m:r>
+                        <m:t>h</m:t>
+                      </m:r>
+                      <m:r>
+                        <m:rPr>
+                          <m:sty m:val="p"/>
+                        </m:rPr>
+                        <m:t>)</m:t>
+                      </m:r>
                       <m:r>
                         <m:rPr>
                           <m:sty m:val="p"/>
@@ -14571,19 +14589,21 @@
                       <m:r>
                         <m:t>p</m:t>
                       </m:r>
-                      <m:d>
-                        <m:dPr>
-                          <m:begChr m:val="("/>
-                          <m:sepChr m:val=""/>
-                          <m:endChr m:val=")"/>
-                          <m:grow/>
-                        </m:dPr>
-                        <m:e>
-                          <m:r>
-                            <m:t>h</m:t>
-                          </m:r>
-                        </m:e>
-                      </m:d>
+                      <m:r>
+                        <m:rPr>
+                          <m:sty m:val="p"/>
+                        </m:rPr>
+                        <m:t>(</m:t>
+                      </m:r>
+                      <m:r>
+                        <m:t>h</m:t>
+                      </m:r>
+                      <m:r>
+                        <m:rPr>
+                          <m:sty m:val="p"/>
+                        </m:rPr>
+                        <m:t>)</m:t>
+                      </m:r>
                       <m:r>
                         <m:t> </m:t>
                       </m:r>
@@ -14785,19 +14805,21 @@
                           </m:r>
                         </m:sup>
                       </m:sSubSup>
-                      <m:d>
-                        <m:dPr>
-                          <m:begChr m:val="("/>
-                          <m:sepChr m:val=""/>
-                          <m:endChr m:val=")"/>
-                          <m:grow/>
-                        </m:dPr>
-                        <m:e>
-                          <m:r>
-                            <m:t>α</m:t>
-                          </m:r>
-                        </m:e>
-                      </m:d>
+                      <m:r>
+                        <m:rPr>
+                          <m:sty m:val="p"/>
+                        </m:rPr>
+                        <m:t>(</m:t>
+                      </m:r>
+                      <m:r>
+                        <m:t>α</m:t>
+                      </m:r>
+                      <m:r>
+                        <m:rPr>
+                          <m:sty m:val="p"/>
+                        </m:rPr>
+                        <m:t>)</m:t>
+                      </m:r>
                     </m:oMath>
                   </m:oMathPara>
                 </a14:m>
@@ -16286,50 +16308,52 @@
                       <m:r>
                         <m:t>E</m:t>
                       </m:r>
-                      <m:d>
-                        <m:dPr>
-                          <m:begChr m:val="["/>
-                          <m:sepChr m:val=""/>
-                          <m:endChr m:val="]"/>
-                          <m:grow/>
-                        </m:dPr>
+                      <m:r>
+                        <m:rPr>
+                          <m:sty m:val="p"/>
+                        </m:rPr>
+                        <m:t>[</m:t>
+                      </m:r>
+                      <m:r>
+                        <m:t>L</m:t>
+                      </m:r>
+                      <m:r>
+                        <m:rPr>
+                          <m:sty m:val="p"/>
+                        </m:rPr>
+                        <m:t>∣</m:t>
+                      </m:r>
+                      <m:r>
+                        <m:t>L</m:t>
+                      </m:r>
+                      <m:r>
+                        <m:rPr>
+                          <m:sty m:val="p"/>
+                        </m:rPr>
+                        <m:t>&gt;</m:t>
+                      </m:r>
+                      <m:sSub>
                         <m:e>
                           <m:r>
-                            <m:t>L</m:t>
-                          </m:r>
-                          <m:r>
                             <m:rPr>
+                              <m:nor/>
                               <m:sty m:val="p"/>
                             </m:rPr>
-                            <m:t>∣</m:t>
+                            <m:t>VaR</m:t>
                           </m:r>
+                        </m:e>
+                        <m:sub>
                           <m:r>
-                            <m:t>L</m:t>
+                            <m:t>α</m:t>
                           </m:r>
-                          <m:r>
-                            <m:rPr>
-                              <m:sty m:val="p"/>
-                            </m:rPr>
-                            <m:t>&gt;</m:t>
-                          </m:r>
-                          <m:sSub>
-                            <m:e>
-                              <m:r>
-                                <m:rPr>
-                                  <m:nor/>
-                                  <m:sty m:val="p"/>
-                                </m:rPr>
-                                <m:t>VaR</m:t>
-                              </m:r>
-                            </m:e>
-                            <m:sub>
-                              <m:r>
-                                <m:t>α</m:t>
-                              </m:r>
-                            </m:sub>
-                          </m:sSub>
-                        </m:e>
-                      </m:d>
+                        </m:sub>
+                      </m:sSub>
+                      <m:r>
+                        <m:rPr>
+                          <m:sty m:val="p"/>
+                        </m:rPr>
+                        <m:t>]</m:t>
+                      </m:r>
                     </m:oMath>
                   </m:oMathPara>
                 </a14:m>
@@ -23002,19 +23026,21 @@
                             <m:r>
                               <m:t>E</m:t>
                             </m:r>
-                            <m:d>
-                              <m:dPr>
-                                <m:begChr m:val="["/>
-                                <m:sepChr m:val=""/>
-                                <m:endChr m:val="]"/>
-                                <m:grow/>
-                              </m:dPr>
-                              <m:e>
-                                <m:r>
-                                  <m:t>D</m:t>
-                                </m:r>
-                              </m:e>
-                            </m:d>
+                            <m:r>
+                              <m:rPr>
+                                <m:sty m:val="p"/>
+                              </m:rPr>
+                              <m:t>[</m:t>
+                            </m:r>
+                            <m:r>
+                              <m:t>D</m:t>
+                            </m:r>
+                            <m:r>
+                              <m:rPr>
+                                <m:sty m:val="p"/>
+                              </m:rPr>
+                              <m:t>]</m:t>
+                            </m:r>
                           </m:e>
                           <m:e>
                             <m:r>
@@ -23032,19 +23058,21 @@
                             <m:r>
                               <m:t>D</m:t>
                             </m:r>
-                            <m:d>
-                              <m:dPr>
-                                <m:begChr m:val="("/>
-                                <m:sepChr m:val=""/>
-                                <m:endChr m:val=")"/>
-                                <m:grow/>
-                              </m:dPr>
-                              <m:e>
-                                <m:r>
-                                  <m:t>h</m:t>
-                                </m:r>
-                              </m:e>
-                            </m:d>
+                            <m:r>
+                              <m:rPr>
+                                <m:sty m:val="p"/>
+                              </m:rPr>
+                              <m:t>(</m:t>
+                            </m:r>
+                            <m:r>
+                              <m:t>h</m:t>
+                            </m:r>
+                            <m:r>
+                              <m:rPr>
+                                <m:sty m:val="p"/>
+                              </m:rPr>
+                              <m:t>)</m:t>
+                            </m:r>
                             <m:r>
                               <m:rPr>
                                 <m:sty m:val="p"/>
@@ -23054,19 +23082,21 @@
                             <m:r>
                               <m:t>p</m:t>
                             </m:r>
-                            <m:d>
-                              <m:dPr>
-                                <m:begChr m:val="("/>
-                                <m:sepChr m:val=""/>
-                                <m:endChr m:val=")"/>
-                                <m:grow/>
-                              </m:dPr>
-                              <m:e>
-                                <m:r>
-                                  <m:t>h</m:t>
-                                </m:r>
-                              </m:e>
-                            </m:d>
+                            <m:r>
+                              <m:rPr>
+                                <m:sty m:val="p"/>
+                              </m:rPr>
+                              <m:t>(</m:t>
+                            </m:r>
+                            <m:r>
+                              <m:t>h</m:t>
+                            </m:r>
+                            <m:r>
+                              <m:rPr>
+                                <m:sty m:val="p"/>
+                              </m:rPr>
+                              <m:t>)</m:t>
+                            </m:r>
                             <m:r>
                               <m:t> </m:t>
                             </m:r>
@@ -23134,28 +23164,30 @@
                                 </m:r>
                               </m:e>
                             </m:nary>
-                            <m:d>
-                              <m:dPr>
-                                <m:begChr m:val="("/>
-                                <m:sepChr m:val=""/>
-                                <m:endChr m:val=")"/>
-                                <m:grow/>
-                              </m:dPr>
+                            <m:r>
+                              <m:rPr>
+                                <m:sty m:val="p"/>
+                              </m:rPr>
+                              <m:t>(</m:t>
+                            </m:r>
+                            <m:sSub>
                               <m:e>
-                                <m:sSub>
-                                  <m:e>
-                                    <m:r>
-                                      <m:t>h</m:t>
-                                    </m:r>
-                                  </m:e>
-                                  <m:sub>
-                                    <m:r>
-                                      <m:t>i</m:t>
-                                    </m:r>
-                                  </m:sub>
-                                </m:sSub>
+                                <m:r>
+                                  <m:t>h</m:t>
+                                </m:r>
                               </m:e>
-                            </m:d>
+                              <m:sub>
+                                <m:r>
+                                  <m:t>i</m:t>
+                                </m:r>
+                              </m:sub>
+                            </m:sSub>
+                            <m:r>
+                              <m:rPr>
+                                <m:sty m:val="p"/>
+                              </m:rPr>
+                              <m:t>)</m:t>
+                            </m:r>
                           </m:e>
                           <m:e>
                             <m:r>
@@ -23186,19 +23218,21 @@
                             <m:r>
                               <m:t>p</m:t>
                             </m:r>
-                            <m:d>
-                              <m:dPr>
-                                <m:begChr m:val="("/>
-                                <m:sepChr m:val=""/>
-                                <m:endChr m:val=")"/>
-                                <m:grow/>
-                              </m:dPr>
-                              <m:e>
-                                <m:r>
-                                  <m:t>h</m:t>
-                                </m:r>
-                              </m:e>
-                            </m:d>
+                            <m:r>
+                              <m:rPr>
+                                <m:sty m:val="p"/>
+                              </m:rPr>
+                              <m:t>(</m:t>
+                            </m:r>
+                            <m:r>
+                              <m:t>h</m:t>
+                            </m:r>
+                            <m:r>
+                              <m:rPr>
+                                <m:sty m:val="p"/>
+                              </m:rPr>
+                              <m:t>)</m:t>
+                            </m:r>
                           </m:e>
                         </m:mr>
                       </m:m>
@@ -23245,19 +23279,21 @@
                     <m:r>
                       <m:t>E</m:t>
                     </m:r>
-                    <m:d>
-                      <m:dPr>
-                        <m:begChr m:val="["/>
-                        <m:sepChr m:val=""/>
-                        <m:endChr m:val="]"/>
-                        <m:grow/>
-                      </m:dPr>
-                      <m:e>
-                        <m:r>
-                          <m:t>D</m:t>
-                        </m:r>
-                      </m:e>
-                    </m:d>
+                    <m:r>
+                      <m:rPr>
+                        <m:sty m:val="p"/>
+                      </m:rPr>
+                      <m:t>[</m:t>
+                    </m:r>
+                    <m:r>
+                      <m:t>D</m:t>
+                    </m:r>
+                    <m:r>
+                      <m:rPr>
+                        <m:sty m:val="p"/>
+                      </m:rPr>
+                      <m:t>]</m:t>
+                    </m:r>
                   </m:oMath>
                 </a14:m>
               </a:p>
@@ -23718,37 +23754,39 @@
                         </m:r>
                       </m:sup>
                     </m:sSup>
-                    <m:d>
-                      <m:dPr>
-                        <m:begChr m:val="("/>
-                        <m:sepChr m:val=""/>
-                        <m:endChr m:val=")"/>
-                        <m:grow/>
-                      </m:dPr>
-                      <m:e>
-                        <m:r>
-                          <m:t>1</m:t>
-                        </m:r>
-                        <m:r>
-                          <m:rPr>
-                            <m:sty m:val="p"/>
-                          </m:rPr>
-                          <m:t>−</m:t>
-                        </m:r>
-                        <m:r>
-                          <m:t>1</m:t>
-                        </m:r>
-                        <m:r>
-                          <m:rPr>
-                            <m:sty m:val="p"/>
-                          </m:rPr>
-                          <m:t>/</m:t>
-                        </m:r>
-                        <m:r>
-                          <m:t>T</m:t>
-                        </m:r>
-                      </m:e>
-                    </m:d>
+                    <m:r>
+                      <m:rPr>
+                        <m:sty m:val="p"/>
+                      </m:rPr>
+                      <m:t>(</m:t>
+                    </m:r>
+                    <m:r>
+                      <m:t>1</m:t>
+                    </m:r>
+                    <m:r>
+                      <m:rPr>
+                        <m:sty m:val="p"/>
+                      </m:rPr>
+                      <m:t>−</m:t>
+                    </m:r>
+                    <m:r>
+                      <m:t>1</m:t>
+                    </m:r>
+                    <m:r>
+                      <m:rPr>
+                        <m:sty m:val="p"/>
+                      </m:rPr>
+                      <m:t>/</m:t>
+                    </m:r>
+                    <m:r>
+                      <m:t>T</m:t>
+                    </m:r>
+                    <m:r>
+                      <m:rPr>
+                        <m:sty m:val="p"/>
+                      </m:rPr>
+                      <m:t>)</m:t>
+                    </m:r>
                   </m:oMath>
                 </a14:m>
               </a:p>
